--- a/OSu/Chap07.pptx
+++ b/OSu/Chap07.pptx
@@ -12182,7 +12182,7 @@
             </a:pPr>
             <a:r>
               <a:rPr lang="en-US" altLang="en-US" sz="2000" dirty="0"/>
-              <a:t>N philosophers sit at a round table with a bowel of rice in the middle</a:t>
+              <a:t>N philosophers sit at a round table with a bowl of rice in the middle</a:t>
             </a:r>
           </a:p>
           <a:p>
@@ -13054,7 +13054,7 @@
                 </a:solidFill>
                 <a:latin typeface="Courier New" panose="02070309020205020404" pitchFamily="49" charset="0"/>
               </a:rPr>
-              <a:t> {THINKING, HUNGRY, EATING} state[5] ;</a:t>
+              <a:t> {THINKING, HUNGRY, EATING} state[5];</a:t>
             </a:r>
           </a:p>
           <a:p>
@@ -15392,9 +15392,6 @@
             <a:br>
               <a:rPr lang="en-US" altLang="en-US" sz="2400" dirty="0"/>
             </a:br>
-            <a:br>
-              <a:rPr lang="en-US" altLang="en-US" sz="2400" dirty="0"/>
-            </a:br>
             <a:r>
               <a:rPr lang="en-US" altLang="en-US" sz="2400" b="1" dirty="0" err="1">
                 <a:latin typeface="Courier New" panose="02070309020205020404" pitchFamily="49" charset="0"/>
@@ -15406,6 +15403,9 @@
               <a:rPr lang="en-US" altLang="en-US" sz="2400" dirty="0"/>
               <a:t> is the type for atomic integer</a:t>
             </a:r>
+          </a:p>
+          <a:p>
+            <a:endParaRPr lang="en-US" altLang="en-US" sz="2400" dirty="0"/>
           </a:p>
           <a:p>
             <a:r>
